--- a/docs/DBP-C1-mindline.pptx
+++ b/docs/DBP-C1-mindline.pptx
@@ -228,10 +228,10 @@
                 <c:ptCount val="4"/>
                 <c:lvl>
                   <c:pt idx="0">
-                    <c:v>Set 4</c:v>
+                    <c:v>DBP C2</c:v>
                   </c:pt>
                   <c:pt idx="1">
-                    <c:v>Set 3</c:v>
+                    <c:v>DBP L2</c:v>
                   </c:pt>
                   <c:pt idx="2">
                     <c:v>DBP C1 (Set 2)</c:v>
@@ -2824,7 +2824,7 @@
         <p:spPr>
           <a:xfrm>
             <a:off x="484632" y="4261104"/>
-            <a:ext cx="6766560" cy="548640"/>
+            <a:ext cx="6949440" cy="548640"/>
           </a:xfrm>
           <a:prstGeom prst="rect">
             <a:avLst/>
@@ -4883,7 +4883,7 @@
                 <a:ea typeface="Arial" pitchFamily="34" charset="-122"/>
                 <a:cs typeface="Arial" pitchFamily="34" charset="-120"/>
               </a:rPr>
-              <a:t>Polyclinic and senior-activity-centre morning peak</a:t>
+              <a:t>Polyclinic and senior-activity morning peak</a:t>
             </a:r>
             <a:endParaRPr lang="en-US" sz="900" dirty="0"/>
           </a:p>
@@ -5891,7 +5891,7 @@
                 <a:ea typeface="Arial" pitchFamily="34" charset="-122"/>
                 <a:cs typeface="Arial" pitchFamily="34" charset="-120"/>
               </a:rPr>
-              <a:t>Place counts differ sharply by route, so the lead creative can be assigned per vehicle rather than per campaign.</a:t>
+              <a:t>One audience per vehicle, assigned to the bus that carries the largest share of it — so all five are briefed.</a:t>
             </a:r>
             <a:endParaRPr lang="en-US" sz="1250" dirty="0"/>
           </a:p>
@@ -6179,7 +6179,7 @@
                 <a:ea typeface="Arial" pitchFamily="34" charset="-122"/>
                 <a:cs typeface="Arial" pitchFamily="34" charset="-120"/>
               </a:rPr>
-              <a:t>CBD corridor · 62 workplace places</a:t>
+              <a:t>62 places · 33% of the package</a:t>
             </a:r>
             <a:endParaRPr lang="en-US" sz="1000" dirty="0"/>
           </a:p>
@@ -6396,7 +6396,7 @@
             <a:avLst/>
           </a:prstGeom>
           <a:solidFill>
-            <a:srgbClr val="1B2D8A"/>
+            <a:srgbClr val="F0245E"/>
           </a:solidFill>
           <a:ln/>
         </p:spPr>
@@ -6592,7 +6592,7 @@
             <a:avLst/>
           </a:prstGeom>
           <a:solidFill>
-            <a:srgbClr val="F0245E"/>
+            <a:srgbClr val="1B2D8A"/>
           </a:solidFill>
           <a:ln/>
         </p:spPr>
@@ -6918,7 +6918,7 @@
                 <a:ea typeface="Arial" pitchFamily="34" charset="-122"/>
                 <a:cs typeface="Arial" pitchFamily="34" charset="-120"/>
               </a:rPr>
-              <a:t>Yio Chu Kang–Shenton Way · 23 youth</a:t>
+              <a:t>23 places · 21% of the package</a:t>
             </a:r>
             <a:endParaRPr lang="en-US" sz="1000" dirty="0"/>
           </a:p>
@@ -7233,7 +7233,7 @@
             <a:avLst/>
           </a:prstGeom>
           <a:solidFill>
-            <a:srgbClr val="1B2D8A"/>
+            <a:srgbClr val="F0245E"/>
           </a:solidFill>
           <a:ln/>
         </p:spPr>
@@ -7331,7 +7331,7 @@
             <a:avLst/>
           </a:prstGeom>
           <a:solidFill>
-            <a:srgbClr val="F0245E"/>
+            <a:srgbClr val="1B2D8A"/>
           </a:solidFill>
           <a:ln/>
         </p:spPr>
@@ -7657,7 +7657,7 @@
                 <a:ea typeface="Arial" pitchFamily="34" charset="-122"/>
                 <a:cs typeface="Arial" pitchFamily="34" charset="-120"/>
               </a:rPr>
-              <a:t>Ang Mo Kio spine · 27 senior places</a:t>
+              <a:t>27 places · 28% of the package</a:t>
             </a:r>
             <a:endParaRPr lang="en-US" sz="1000" dirty="0"/>
           </a:p>
@@ -7776,7 +7776,7 @@
             <a:avLst/>
           </a:prstGeom>
           <a:solidFill>
-            <a:srgbClr val="1B2D8A"/>
+            <a:srgbClr val="F0245E"/>
           </a:solidFill>
           <a:ln/>
         </p:spPr>
@@ -8070,7 +8070,7 @@
             <a:avLst/>
           </a:prstGeom>
           <a:solidFill>
-            <a:srgbClr val="F0245E"/>
+            <a:srgbClr val="1B2D8A"/>
           </a:solidFill>
           <a:ln/>
         </p:spPr>
@@ -8396,7 +8396,7 @@
                 <a:ea typeface="Arial" pitchFamily="34" charset="-122"/>
                 <a:cs typeface="Arial" pitchFamily="34" charset="-120"/>
               </a:rPr>
-              <a:t>Boon Lay–Bt Merah · 26 caregiving</a:t>
+              <a:t>26 places · 26% of the package</a:t>
             </a:r>
             <a:endParaRPr lang="en-US" sz="1000" dirty="0"/>
           </a:p>
@@ -9135,7 +9135,7 @@
                 <a:ea typeface="Arial" pitchFamily="34" charset="-122"/>
                 <a:cs typeface="Arial" pitchFamily="34" charset="-120"/>
               </a:rPr>
-              <a:t>Punggol–Yishun · 33 child, 28 caregiving</a:t>
+              <a:t>33 places · 29% of the package</a:t>
             </a:r>
             <a:endParaRPr lang="en-US" sz="1000" dirty="0"/>
           </a:p>
@@ -9151,6 +9151,104 @@
           <a:xfrm>
             <a:off x="6858000" y="5502033"/>
             <a:ext cx="384048" cy="194679"/>
+          </a:xfrm>
+          <a:prstGeom prst="rect">
+            <a:avLst/>
+          </a:prstGeom>
+          <a:solidFill>
+            <a:srgbClr val="F0245E"/>
+          </a:solidFill>
+          <a:ln/>
+        </p:spPr>
+      </p:sp>
+      <p:sp>
+        <p:nvSpPr>
+          <p:cNvPr id="103" name="Text 101"/>
+          <p:cNvSpPr/>
+          <p:nvPr/>
+        </p:nvSpPr>
+        <p:spPr>
+          <a:xfrm>
+            <a:off x="6775704" y="5705856"/>
+            <a:ext cx="548640" cy="182880"/>
+          </a:xfrm>
+          <a:prstGeom prst="rect">
+            <a:avLst/>
+          </a:prstGeom>
+          <a:noFill/>
+          <a:ln/>
+        </p:spPr>
+        <p:txBody>
+          <a:bodyPr wrap="square" lIns="0" tIns="0" rIns="0" bIns="0" rtlCol="0" anchor="ctr"/>
+          <a:lstStyle/>
+          <a:p>
+            <a:pPr algn="ctr" indent="0" marL="0">
+              <a:buNone/>
+            </a:pPr>
+            <a:r>
+              <a:rPr lang="en-US" sz="800" dirty="0">
+                <a:solidFill>
+                  <a:srgbClr val="5A6484"/>
+                </a:solidFill>
+                <a:latin typeface="Arial" pitchFamily="34" charset="0"/>
+                <a:ea typeface="Arial" pitchFamily="34" charset="-122"/>
+                <a:cs typeface="Arial" pitchFamily="34" charset="-120"/>
+              </a:rPr>
+              <a:t>33</a:t>
+            </a:r>
+            <a:endParaRPr lang="en-US" sz="800" dirty="0"/>
+          </a:p>
+        </p:txBody>
+      </p:sp>
+      <p:sp>
+        <p:nvSpPr>
+          <p:cNvPr id="104" name="Text 102"/>
+          <p:cNvSpPr/>
+          <p:nvPr/>
+        </p:nvSpPr>
+        <p:spPr>
+          <a:xfrm>
+            <a:off x="6775704" y="5193792"/>
+            <a:ext cx="548640" cy="146304"/>
+          </a:xfrm>
+          <a:prstGeom prst="rect">
+            <a:avLst/>
+          </a:prstGeom>
+          <a:noFill/>
+          <a:ln/>
+        </p:spPr>
+        <p:txBody>
+          <a:bodyPr wrap="square" lIns="0" tIns="0" rIns="0" bIns="0" rtlCol="0" anchor="ctr"/>
+          <a:lstStyle/>
+          <a:p>
+            <a:pPr algn="ctr" indent="0" marL="0">
+              <a:buNone/>
+            </a:pPr>
+            <a:r>
+              <a:rPr lang="en-US" sz="700" dirty="0">
+                <a:solidFill>
+                  <a:srgbClr val="5A6484"/>
+                </a:solidFill>
+                <a:latin typeface="Arial" pitchFamily="34" charset="0"/>
+                <a:ea typeface="Arial" pitchFamily="34" charset="-122"/>
+                <a:cs typeface="Arial" pitchFamily="34" charset="-120"/>
+              </a:rPr>
+              <a:t>Chld</a:t>
+            </a:r>
+            <a:endParaRPr lang="en-US" sz="700" dirty="0"/>
+          </a:p>
+        </p:txBody>
+      </p:sp>
+      <p:sp>
+        <p:nvSpPr>
+          <p:cNvPr id="105" name="Shape 103"/>
+          <p:cNvSpPr/>
+          <p:nvPr/>
+        </p:nvSpPr>
+        <p:spPr>
+          <a:xfrm>
+            <a:off x="7424928" y="5578725"/>
+            <a:ext cx="384048" cy="117987"/>
           </a:xfrm>
           <a:prstGeom prst="rect">
             <a:avLst/>
@@ -9163,13 +9261,13 @@
       </p:sp>
       <p:sp>
         <p:nvSpPr>
-          <p:cNvPr id="103" name="Text 101"/>
-          <p:cNvSpPr/>
-          <p:nvPr/>
-        </p:nvSpPr>
-        <p:spPr>
-          <a:xfrm>
-            <a:off x="6775704" y="5705856"/>
+          <p:cNvPr id="106" name="Text 104"/>
+          <p:cNvSpPr/>
+          <p:nvPr/>
+        </p:nvSpPr>
+        <p:spPr>
+          <a:xfrm>
+            <a:off x="7342632" y="5705856"/>
             <a:ext cx="548640" cy="182880"/>
           </a:xfrm>
           <a:prstGeom prst="rect">
@@ -9194,7 +9292,7 @@
                 <a:ea typeface="Arial" pitchFamily="34" charset="-122"/>
                 <a:cs typeface="Arial" pitchFamily="34" charset="-120"/>
               </a:rPr>
-              <a:t>33</a:t>
+              <a:t>20</a:t>
             </a:r>
             <a:endParaRPr lang="en-US" sz="800" dirty="0"/>
           </a:p>
@@ -9202,13 +9300,13 @@
       </p:sp>
       <p:sp>
         <p:nvSpPr>
-          <p:cNvPr id="104" name="Text 102"/>
-          <p:cNvSpPr/>
-          <p:nvPr/>
-        </p:nvSpPr>
-        <p:spPr>
-          <a:xfrm>
-            <a:off x="6775704" y="5193792"/>
+          <p:cNvPr id="107" name="Text 105"/>
+          <p:cNvSpPr/>
+          <p:nvPr/>
+        </p:nvSpPr>
+        <p:spPr>
+          <a:xfrm>
+            <a:off x="7342632" y="5193792"/>
             <a:ext cx="548640" cy="146304"/>
           </a:xfrm>
           <a:prstGeom prst="rect">
@@ -9233,7 +9331,7 @@
                 <a:ea typeface="Arial" pitchFamily="34" charset="-122"/>
                 <a:cs typeface="Arial" pitchFamily="34" charset="-120"/>
               </a:rPr>
-              <a:t>Chld</a:t>
+              <a:t>Snr</a:t>
             </a:r>
             <a:endParaRPr lang="en-US" sz="700" dirty="0"/>
           </a:p>
@@ -9241,14 +9339,14 @@
       </p:sp>
       <p:sp>
         <p:nvSpPr>
-          <p:cNvPr id="105" name="Shape 103"/>
-          <p:cNvSpPr/>
-          <p:nvPr/>
-        </p:nvSpPr>
-        <p:spPr>
-          <a:xfrm>
-            <a:off x="7424928" y="5578725"/>
-            <a:ext cx="384048" cy="117987"/>
+          <p:cNvPr id="108" name="Shape 106"/>
+          <p:cNvSpPr/>
+          <p:nvPr/>
+        </p:nvSpPr>
+        <p:spPr>
+          <a:xfrm>
+            <a:off x="7991856" y="5643618"/>
+            <a:ext cx="384048" cy="53094"/>
           </a:xfrm>
           <a:prstGeom prst="rect">
             <a:avLst/>
@@ -9261,13 +9359,13 @@
       </p:sp>
       <p:sp>
         <p:nvSpPr>
-          <p:cNvPr id="106" name="Text 104"/>
-          <p:cNvSpPr/>
-          <p:nvPr/>
-        </p:nvSpPr>
-        <p:spPr>
-          <a:xfrm>
-            <a:off x="7342632" y="5705856"/>
+          <p:cNvPr id="109" name="Text 107"/>
+          <p:cNvSpPr/>
+          <p:nvPr/>
+        </p:nvSpPr>
+        <p:spPr>
+          <a:xfrm>
+            <a:off x="7909560" y="5705856"/>
             <a:ext cx="548640" cy="182880"/>
           </a:xfrm>
           <a:prstGeom prst="rect">
@@ -9292,7 +9390,7 @@
                 <a:ea typeface="Arial" pitchFamily="34" charset="-122"/>
                 <a:cs typeface="Arial" pitchFamily="34" charset="-120"/>
               </a:rPr>
-              <a:t>20</a:t>
+              <a:t>9</a:t>
             </a:r>
             <a:endParaRPr lang="en-US" sz="800" dirty="0"/>
           </a:p>
@@ -9300,13 +9398,13 @@
       </p:sp>
       <p:sp>
         <p:nvSpPr>
-          <p:cNvPr id="107" name="Text 105"/>
-          <p:cNvSpPr/>
-          <p:nvPr/>
-        </p:nvSpPr>
-        <p:spPr>
-          <a:xfrm>
-            <a:off x="7342632" y="5193792"/>
+          <p:cNvPr id="110" name="Text 108"/>
+          <p:cNvSpPr/>
+          <p:nvPr/>
+        </p:nvSpPr>
+        <p:spPr>
+          <a:xfrm>
+            <a:off x="7909560" y="5193792"/>
             <a:ext cx="548640" cy="146304"/>
           </a:xfrm>
           <a:prstGeom prst="rect">
@@ -9331,7 +9429,7 @@
                 <a:ea typeface="Arial" pitchFamily="34" charset="-122"/>
                 <a:cs typeface="Arial" pitchFamily="34" charset="-120"/>
               </a:rPr>
-              <a:t>Snr</a:t>
+              <a:t>Wrk</a:t>
             </a:r>
             <a:endParaRPr lang="en-US" sz="700" dirty="0"/>
           </a:p>
@@ -9339,14 +9437,14 @@
       </p:sp>
       <p:sp>
         <p:nvSpPr>
-          <p:cNvPr id="108" name="Shape 106"/>
-          <p:cNvSpPr/>
-          <p:nvPr/>
-        </p:nvSpPr>
-        <p:spPr>
-          <a:xfrm>
-            <a:off x="7991856" y="5643618"/>
-            <a:ext cx="384048" cy="53094"/>
+          <p:cNvPr id="111" name="Shape 109"/>
+          <p:cNvSpPr/>
+          <p:nvPr/>
+        </p:nvSpPr>
+        <p:spPr>
+          <a:xfrm>
+            <a:off x="8558784" y="5608222"/>
+            <a:ext cx="384048" cy="88490"/>
           </a:xfrm>
           <a:prstGeom prst="rect">
             <a:avLst/>
@@ -9359,13 +9457,13 @@
       </p:sp>
       <p:sp>
         <p:nvSpPr>
-          <p:cNvPr id="109" name="Text 107"/>
-          <p:cNvSpPr/>
-          <p:nvPr/>
-        </p:nvSpPr>
-        <p:spPr>
-          <a:xfrm>
-            <a:off x="7909560" y="5705856"/>
+          <p:cNvPr id="112" name="Text 110"/>
+          <p:cNvSpPr/>
+          <p:nvPr/>
+        </p:nvSpPr>
+        <p:spPr>
+          <a:xfrm>
+            <a:off x="8476488" y="5705856"/>
             <a:ext cx="548640" cy="182880"/>
           </a:xfrm>
           <a:prstGeom prst="rect">
@@ -9390,7 +9488,7 @@
                 <a:ea typeface="Arial" pitchFamily="34" charset="-122"/>
                 <a:cs typeface="Arial" pitchFamily="34" charset="-120"/>
               </a:rPr>
-              <a:t>9</a:t>
+              <a:t>15</a:t>
             </a:r>
             <a:endParaRPr lang="en-US" sz="800" dirty="0"/>
           </a:p>
@@ -9398,13 +9496,13 @@
       </p:sp>
       <p:sp>
         <p:nvSpPr>
-          <p:cNvPr id="110" name="Text 108"/>
-          <p:cNvSpPr/>
-          <p:nvPr/>
-        </p:nvSpPr>
-        <p:spPr>
-          <a:xfrm>
-            <a:off x="7909560" y="5193792"/>
+          <p:cNvPr id="113" name="Text 111"/>
+          <p:cNvSpPr/>
+          <p:nvPr/>
+        </p:nvSpPr>
+        <p:spPr>
+          <a:xfrm>
+            <a:off x="8476488" y="5193792"/>
             <a:ext cx="548640" cy="146304"/>
           </a:xfrm>
           <a:prstGeom prst="rect">
@@ -9429,7 +9527,7 @@
                 <a:ea typeface="Arial" pitchFamily="34" charset="-122"/>
                 <a:cs typeface="Arial" pitchFamily="34" charset="-120"/>
               </a:rPr>
-              <a:t>Wrk</a:t>
+              <a:t>Yth</a:t>
             </a:r>
             <a:endParaRPr lang="en-US" sz="700" dirty="0"/>
           </a:p>
@@ -9437,14 +9535,14 @@
       </p:sp>
       <p:sp>
         <p:nvSpPr>
-          <p:cNvPr id="111" name="Shape 109"/>
-          <p:cNvSpPr/>
-          <p:nvPr/>
-        </p:nvSpPr>
-        <p:spPr>
-          <a:xfrm>
-            <a:off x="8558784" y="5608222"/>
-            <a:ext cx="384048" cy="88490"/>
+          <p:cNvPr id="114" name="Shape 112"/>
+          <p:cNvSpPr/>
+          <p:nvPr/>
+        </p:nvSpPr>
+        <p:spPr>
+          <a:xfrm>
+            <a:off x="9125712" y="5531530"/>
+            <a:ext cx="384048" cy="165182"/>
           </a:xfrm>
           <a:prstGeom prst="rect">
             <a:avLst/>
@@ -9457,104 +9555,6 @@
       </p:sp>
       <p:sp>
         <p:nvSpPr>
-          <p:cNvPr id="112" name="Text 110"/>
-          <p:cNvSpPr/>
-          <p:nvPr/>
-        </p:nvSpPr>
-        <p:spPr>
-          <a:xfrm>
-            <a:off x="8476488" y="5705856"/>
-            <a:ext cx="548640" cy="182880"/>
-          </a:xfrm>
-          <a:prstGeom prst="rect">
-            <a:avLst/>
-          </a:prstGeom>
-          <a:noFill/>
-          <a:ln/>
-        </p:spPr>
-        <p:txBody>
-          <a:bodyPr wrap="square" lIns="0" tIns="0" rIns="0" bIns="0" rtlCol="0" anchor="ctr"/>
-          <a:lstStyle/>
-          <a:p>
-            <a:pPr algn="ctr" indent="0" marL="0">
-              <a:buNone/>
-            </a:pPr>
-            <a:r>
-              <a:rPr lang="en-US" sz="800" dirty="0">
-                <a:solidFill>
-                  <a:srgbClr val="5A6484"/>
-                </a:solidFill>
-                <a:latin typeface="Arial" pitchFamily="34" charset="0"/>
-                <a:ea typeface="Arial" pitchFamily="34" charset="-122"/>
-                <a:cs typeface="Arial" pitchFamily="34" charset="-120"/>
-              </a:rPr>
-              <a:t>15</a:t>
-            </a:r>
-            <a:endParaRPr lang="en-US" sz="800" dirty="0"/>
-          </a:p>
-        </p:txBody>
-      </p:sp>
-      <p:sp>
-        <p:nvSpPr>
-          <p:cNvPr id="113" name="Text 111"/>
-          <p:cNvSpPr/>
-          <p:nvPr/>
-        </p:nvSpPr>
-        <p:spPr>
-          <a:xfrm>
-            <a:off x="8476488" y="5193792"/>
-            <a:ext cx="548640" cy="146304"/>
-          </a:xfrm>
-          <a:prstGeom prst="rect">
-            <a:avLst/>
-          </a:prstGeom>
-          <a:noFill/>
-          <a:ln/>
-        </p:spPr>
-        <p:txBody>
-          <a:bodyPr wrap="square" lIns="0" tIns="0" rIns="0" bIns="0" rtlCol="0" anchor="ctr"/>
-          <a:lstStyle/>
-          <a:p>
-            <a:pPr algn="ctr" indent="0" marL="0">
-              <a:buNone/>
-            </a:pPr>
-            <a:r>
-              <a:rPr lang="en-US" sz="700" dirty="0">
-                <a:solidFill>
-                  <a:srgbClr val="5A6484"/>
-                </a:solidFill>
-                <a:latin typeface="Arial" pitchFamily="34" charset="0"/>
-                <a:ea typeface="Arial" pitchFamily="34" charset="-122"/>
-                <a:cs typeface="Arial" pitchFamily="34" charset="-120"/>
-              </a:rPr>
-              <a:t>Yth</a:t>
-            </a:r>
-            <a:endParaRPr lang="en-US" sz="700" dirty="0"/>
-          </a:p>
-        </p:txBody>
-      </p:sp>
-      <p:sp>
-        <p:nvSpPr>
-          <p:cNvPr id="114" name="Shape 112"/>
-          <p:cNvSpPr/>
-          <p:nvPr/>
-        </p:nvSpPr>
-        <p:spPr>
-          <a:xfrm>
-            <a:off x="9125712" y="5531530"/>
-            <a:ext cx="384048" cy="165182"/>
-          </a:xfrm>
-          <a:prstGeom prst="rect">
-            <a:avLst/>
-          </a:prstGeom>
-          <a:solidFill>
-            <a:srgbClr val="F0245E"/>
-          </a:solidFill>
-          <a:ln/>
-        </p:spPr>
-      </p:sp>
-      <p:sp>
-        <p:nvSpPr>
           <p:cNvPr id="115" name="Text 113"/>
           <p:cNvSpPr/>
           <p:nvPr/>
@@ -9679,7 +9679,7 @@
         <p:spPr>
           <a:xfrm>
             <a:off x="502920" y="6035040"/>
-            <a:ext cx="8595360" cy="310896"/>
+            <a:ext cx="9052560" cy="310896"/>
           </a:xfrm>
           <a:prstGeom prst="rect">
             <a:avLst/>
@@ -9703,7 +9703,7 @@
                 <a:ea typeface="Arial" pitchFamily="34" charset="-122"/>
                 <a:cs typeface="Arial" pitchFamily="34" charset="-120"/>
               </a:rPr>
-              <a:t>Bars are place counts within 400 m of that route’s stops, on one scale across all five. Lead creative = the audience that route over-indexes on.</a:t>
+              <a:t>Bars are place counts within 400 m of that route’s stops, on one scale across all five. Pink marks the audience that bus is briefed for.</a:t>
             </a:r>
             <a:endParaRPr lang="en-US" sz="950" dirty="0"/>
           </a:p>
@@ -9993,8 +9993,8 @@
         </p:nvSpPr>
         <p:spPr>
           <a:xfrm>
-            <a:off x="795528" y="2048256"/>
-            <a:ext cx="10515600" cy="310896"/>
+            <a:off x="795528" y="2011680"/>
+            <a:ext cx="10515600" cy="292608"/>
           </a:xfrm>
           <a:prstGeom prst="rect">
             <a:avLst/>
@@ -10010,7 +10010,7 @@
               <a:buNone/>
             </a:pPr>
             <a:r>
-              <a:rPr lang="en-US" sz="1300" b="1" dirty="0">
+              <a:rPr lang="en-US" sz="1250" b="1" dirty="0">
                 <a:solidFill>
                   <a:srgbClr val="F0245E"/>
                 </a:solidFill>
@@ -10020,7 +10020,7 @@
               </a:rPr>
               <a:t>DBP C1 has no East Region coverage</a:t>
             </a:r>
-            <a:endParaRPr lang="en-US" sz="1300" dirty="0"/>
+            <a:endParaRPr lang="en-US" sz="1250" dirty="0"/>
           </a:p>
         </p:txBody>
       </p:sp>
@@ -10032,8 +10032,8 @@
         </p:nvSpPr>
         <p:spPr>
           <a:xfrm>
-            <a:off x="795528" y="2359152"/>
-            <a:ext cx="10515600" cy="438912"/>
+            <a:off x="795528" y="2304288"/>
+            <a:ext cx="10515600" cy="512064"/>
           </a:xfrm>
           <a:prstGeom prst="rect">
             <a:avLst/>
@@ -10049,7 +10049,7 @@
               <a:buNone/>
             </a:pPr>
             <a:r>
-              <a:rPr lang="en-US" sz="1100" dirty="0">
+              <a:rPr lang="en-US" sz="1050" dirty="0">
                 <a:solidFill>
                   <a:srgbClr val="5A6484"/>
                 </a:solidFill>
@@ -10057,9 +10057,9 @@
                 <a:ea typeface="Arial" pitchFamily="34" charset="-122"/>
                 <a:cs typeface="Arial" pitchFamily="34" charset="-120"/>
               </a:rPr>
-              <a:t>No Bedok, Tampines or Pasir Ris. It is the mirror image of Set 3’s northern gap. If the campaign runs two flights, DBP C1 then Set 1 covers the country far better than DBP C1 twice.</a:t>
-            </a:r>
-            <a:endParaRPr lang="en-US" sz="1100" dirty="0"/>
+              <a:t>No Bedok, Tampines or Pasir Ris. It is the mirror image of DBP L2’s northern gap. If the campaign runs two flights, DBP C1 then Set 1 covers the country far better than DBP C1 twice.</a:t>
+            </a:r>
+            <a:endParaRPr lang="en-US" sz="1050" dirty="0"/>
           </a:p>
         </p:txBody>
       </p:sp>
@@ -10098,8 +10098,8 @@
         </p:nvSpPr>
         <p:spPr>
           <a:xfrm>
-            <a:off x="795528" y="3108960"/>
-            <a:ext cx="10515600" cy="310896"/>
+            <a:off x="795528" y="3072384"/>
+            <a:ext cx="10515600" cy="292608"/>
           </a:xfrm>
           <a:prstGeom prst="rect">
             <a:avLst/>
@@ -10115,7 +10115,7 @@
               <a:buNone/>
             </a:pPr>
             <a:r>
-              <a:rPr lang="en-US" sz="1300" b="1" dirty="0">
+              <a:rPr lang="en-US" sz="1250" b="1" dirty="0">
                 <a:solidFill>
                   <a:srgbClr val="1B2D8A"/>
                 </a:solidFill>
@@ -10125,7 +10125,7 @@
               </a:rPr>
               <a:t>Boardings are not impressions</a:t>
             </a:r>
-            <a:endParaRPr lang="en-US" sz="1300" dirty="0"/>
+            <a:endParaRPr lang="en-US" sz="1250" dirty="0"/>
           </a:p>
         </p:txBody>
       </p:sp>
@@ -10137,8 +10137,8 @@
         </p:nvSpPr>
         <p:spPr>
           <a:xfrm>
-            <a:off x="795528" y="3419856"/>
-            <a:ext cx="10515600" cy="438912"/>
+            <a:off x="795528" y="3364992"/>
+            <a:ext cx="10515600" cy="512064"/>
           </a:xfrm>
           <a:prstGeom prst="rect">
             <a:avLst/>
@@ -10154,7 +10154,7 @@
               <a:buNone/>
             </a:pPr>
             <a:r>
-              <a:rPr lang="en-US" sz="1100" dirty="0">
+              <a:rPr lang="en-US" sz="1050" dirty="0">
                 <a:solidFill>
                   <a:srgbClr val="5A6484"/>
                 </a:solidFill>
@@ -10164,7 +10164,7 @@
               </a:rPr>
               <a:t>The volume data counts people boarding at a stop. A bus ad is seen along the whole corridor by people who never board. It is a sound basis for comparing sets — it is not a reach guarantee, and we will not quote it as one.</a:t>
             </a:r>
-            <a:endParaRPr lang="en-US" sz="1100" dirty="0"/>
+            <a:endParaRPr lang="en-US" sz="1050" dirty="0"/>
           </a:p>
         </p:txBody>
       </p:sp>
@@ -10203,8 +10203,8 @@
         </p:nvSpPr>
         <p:spPr>
           <a:xfrm>
-            <a:off x="795528" y="4169664"/>
-            <a:ext cx="10515600" cy="310896"/>
+            <a:off x="795528" y="4133088"/>
+            <a:ext cx="10515600" cy="292608"/>
           </a:xfrm>
           <a:prstGeom prst="rect">
             <a:avLst/>
@@ -10220,7 +10220,7 @@
               <a:buNone/>
             </a:pPr>
             <a:r>
-              <a:rPr lang="en-US" sz="1300" b="1" dirty="0">
+              <a:rPr lang="en-US" sz="1250" b="1" dirty="0">
                 <a:solidFill>
                   <a:srgbClr val="1B2D8A"/>
                 </a:solidFill>
@@ -10230,7 +10230,7 @@
               </a:rPr>
               <a:t>Cohort shares are area averages</a:t>
             </a:r>
-            <a:endParaRPr lang="en-US" sz="1300" dirty="0"/>
+            <a:endParaRPr lang="en-US" sz="1250" dirty="0"/>
           </a:p>
         </p:txBody>
       </p:sp>
@@ -10242,8 +10242,8 @@
         </p:nvSpPr>
         <p:spPr>
           <a:xfrm>
-            <a:off x="795528" y="4480560"/>
-            <a:ext cx="10515600" cy="438912"/>
+            <a:off x="795528" y="4425696"/>
+            <a:ext cx="10515600" cy="512064"/>
           </a:xfrm>
           <a:prstGeom prst="rect">
             <a:avLst/>
@@ -10259,7 +10259,7 @@
               <a:buNone/>
             </a:pPr>
             <a:r>
-              <a:rPr lang="en-US" sz="1100" dirty="0">
+              <a:rPr lang="en-US" sz="1050" dirty="0">
                 <a:solidFill>
                   <a:srgbClr val="5A6484"/>
                 </a:solidFill>
@@ -10269,7 +10269,7 @@
               </a:rPr>
               <a:t>They say a stop sits in a senior-dense town, not that the queue at that stop is old.</a:t>
             </a:r>
-            <a:endParaRPr lang="en-US" sz="1100" dirty="0"/>
+            <a:endParaRPr lang="en-US" sz="1050" dirty="0"/>
           </a:p>
         </p:txBody>
       </p:sp>
@@ -10308,8 +10308,8 @@
         </p:nvSpPr>
         <p:spPr>
           <a:xfrm>
-            <a:off x="795528" y="5230368"/>
-            <a:ext cx="10515600" cy="310896"/>
+            <a:off x="795528" y="5193792"/>
+            <a:ext cx="10515600" cy="292608"/>
           </a:xfrm>
           <a:prstGeom prst="rect">
             <a:avLst/>
@@ -10325,7 +10325,7 @@
               <a:buNone/>
             </a:pPr>
             <a:r>
-              <a:rPr lang="en-US" sz="1300" b="1" dirty="0">
+              <a:rPr lang="en-US" sz="1250" b="1" dirty="0">
                 <a:solidFill>
                   <a:srgbClr val="1B2D8A"/>
                 </a:solidFill>
@@ -10335,7 +10335,7 @@
               </a:rPr>
               <a:t>Dayparts are assumptions, not measurements</a:t>
             </a:r>
-            <a:endParaRPr lang="en-US" sz="1300" dirty="0"/>
+            <a:endParaRPr lang="en-US" sz="1250" dirty="0"/>
           </a:p>
         </p:txBody>
       </p:sp>
@@ -10347,8 +10347,8 @@
         </p:nvSpPr>
         <p:spPr>
           <a:xfrm>
-            <a:off x="795528" y="5541264"/>
-            <a:ext cx="10515600" cy="438912"/>
+            <a:off x="795528" y="5486400"/>
+            <a:ext cx="10515600" cy="512064"/>
           </a:xfrm>
           <a:prstGeom prst="rect">
             <a:avLst/>
@@ -10364,7 +10364,7 @@
               <a:buNone/>
             </a:pPr>
             <a:r>
-              <a:rPr lang="en-US" sz="1100" dirty="0">
+              <a:rPr lang="en-US" sz="1050" dirty="0">
                 <a:solidFill>
                   <a:srgbClr val="5A6484"/>
                 </a:solidFill>
@@ -10374,7 +10374,7 @@
               </a:rPr>
               <a:t>Set from institution operating hours. If hourly boarding data can be licensed from LTA, these windows should be re-derived from it before the second flight.</a:t>
             </a:r>
-            <a:endParaRPr lang="en-US" sz="1100" dirty="0"/>
+            <a:endParaRPr lang="en-US" sz="1050" dirty="0"/>
           </a:p>
         </p:txBody>
       </p:sp>
@@ -11427,7 +11427,7 @@
         <p:spPr>
           <a:xfrm>
             <a:off x="502920" y="6016752"/>
-            <a:ext cx="7863840" cy="310896"/>
+            <a:ext cx="8046720" cy="310896"/>
           </a:xfrm>
           <a:prstGeom prst="rect">
             <a:avLst/>
@@ -11451,7 +11451,7 @@
                 <a:ea typeface="Arial" pitchFamily="34" charset="-122"/>
                 <a:cs typeface="Arial" pitchFamily="34" charset="-120"/>
               </a:rPr>
-              <a:t>Reproduce every figure in this deck — python3 tools/mindline_eval.py · tools/dbp_c1_dco.py</a:t>
+              <a:t>Reproduce every figure in this deck — python3 tools/mindline_eval.py · tools/package_dco.py "DBP C1"</a:t>
             </a:r>
             <a:endParaRPr lang="en-US" sz="950" dirty="0"/>
           </a:p>
@@ -14573,7 +14573,7 @@
                 <a:ea typeface="Arial" pitchFamily="34" charset="-122"/>
                 <a:cs typeface="Arial" pitchFamily="34" charset="-120"/>
               </a:rPr>
-              <a:t>Set 3</a:t>
+              <a:t>DBP L2</a:t>
             </a:r>
             <a:endParaRPr lang="en-US" sz="1150" dirty="0"/>
           </a:p>
@@ -14807,7 +14807,7 @@
                 <a:ea typeface="Arial" pitchFamily="34" charset="-122"/>
                 <a:cs typeface="Arial" pitchFamily="34" charset="-120"/>
               </a:rPr>
-              <a:t>Set 4</a:t>
+              <a:t>DBP C2</a:t>
             </a:r>
             <a:endParaRPr lang="en-US" sz="1150" dirty="0"/>
           </a:p>
@@ -15068,7 +15068,7 @@
                 <a:ea typeface="Arial" pitchFamily="34" charset="-122"/>
                 <a:cs typeface="Arial" pitchFamily="34" charset="-120"/>
               </a:rPr>
-              <a:t>Set 3 scores within half a point of DBP C1 — and on the index alone the two swap places depending on how you weight them. The score does not separate them. Slide 8 does.</a:t>
+              <a:t>DBP L2 scores within half a point of DBP C1 — and on the index alone the two swap places depending on how you weight them. The score does not separate them. Slide 8 does.</a:t>
             </a:r>
             <a:endParaRPr lang="en-US" sz="1100" dirty="0"/>
           </a:p>
@@ -15550,7 +15550,7 @@
                 <a:ea typeface="Arial" pitchFamily="34" charset="-122"/>
                 <a:cs typeface="Arial" pitchFamily="34" charset="-120"/>
               </a:rPr>
-              <a:t>Set 3</a:t>
+              <a:t>DBP L2</a:t>
             </a:r>
             <a:endParaRPr lang="en-US" sz="2000" dirty="0"/>
           </a:p>
@@ -15717,7 +15717,7 @@
                 <a:ea typeface="Arial" pitchFamily="34" charset="-122"/>
                 <a:cs typeface="Arial" pitchFamily="34" charset="-120"/>
               </a:rPr>
-              <a:t>Set 4</a:t>
+              <a:t>DBP C2</a:t>
             </a:r>
             <a:endParaRPr lang="en-US" sz="2000" dirty="0"/>
           </a:p>
@@ -17500,7 +17500,7 @@
                 <a:ea typeface="Arial" pitchFamily="34" charset="-122"/>
                 <a:cs typeface="Arial" pitchFamily="34" charset="-120"/>
               </a:rPr>
-              <a:t>Set 3: 87   ·   Set 4: 84   ·   Set 1: 77</a:t>
+              <a:t>DBP L2: 87   ·   DBP C2: 84   ·   Set 1: 77</a:t>
             </a:r>
             <a:endParaRPr lang="en-US" sz="1100" dirty="0"/>
           </a:p>
@@ -17596,31 +17596,6 @@
             <a:pPr indent="0" marL="0">
               <a:buNone/>
             </a:pPr>
-            <a:r>
-              <a:rPr lang="en-US" sz="1150" b="1" dirty="0">
-                <a:solidFill>
-                  <a:srgbClr val="5A6484"/>
-                </a:solidFill>
-                <a:latin typeface="Arial" pitchFamily="34" charset="0"/>
-                <a:ea typeface="Arial" pitchFamily="34" charset="-122"/>
-                <a:cs typeface="Arial" pitchFamily="34" charset="-120"/>
-              </a:rPr>
-              <a:t>A long route cannot fake it. </a:t>
-            </a:r>
-            <a:pPr indent="0" marL="0">
-              <a:buNone/>
-            </a:pPr>
-            <a:r>
-              <a:rPr lang="en-US" sz="1150" dirty="0">
-                <a:solidFill>
-                  <a:srgbClr val="5A6484"/>
-                </a:solidFill>
-                <a:latin typeface="Arial" pitchFamily="34" charset="0"/>
-                <a:ea typeface="Arial" pitchFamily="34" charset="-122"/>
-                <a:cs typeface="Arial" pitchFamily="34" charset="-120"/>
-              </a:rPr>
-              <a:t>Coverage metrics reward length — run a bus far enough and it passes more of everything. This one does not work that way: the two land uses have to physically coincide at the same stop.</a:t>
-            </a:r>
             <a:endParaRPr lang="en-US" sz="1150" dirty="0"/>
           </a:p>
         </p:txBody>
@@ -17697,7 +17672,7 @@
                 <a:ea typeface="Arial" pitchFamily="34" charset="-122"/>
                 <a:cs typeface="Arial" pitchFamily="34" charset="-120"/>
               </a:rPr>
-              <a:t>DBP C1 carries 0.250 caregiving stops per stop bought — the highest of the four sets, and 34% ahead of Set 3.</a:t>
+              <a:t>DBP C1 carries 0.250 caregiving stops per stop bought — the highest of the four sets, and 34% ahead of DBP L2.</a:t>
             </a:r>
             <a:endParaRPr lang="en-US" sz="1200" dirty="0"/>
           </a:p>
@@ -18939,7 +18914,7 @@
                 <a:ea typeface="Arial" pitchFamily="34" charset="-122"/>
                 <a:cs typeface="Arial" pitchFamily="34" charset="-120"/>
               </a:rPr>
-              <a:t>Set 3</a:t>
+              <a:t>DBP L2</a:t>
             </a:r>
             <a:endParaRPr lang="en-US" sz="1300" dirty="0"/>
           </a:p>
@@ -19288,7 +19263,7 @@
                 <a:ea typeface="Arial" pitchFamily="34" charset="-122"/>
                 <a:cs typeface="Arial" pitchFamily="34" charset="-120"/>
               </a:rPr>
-              <a:t>Set 4</a:t>
+              <a:t>DBP C2</a:t>
             </a:r>
             <a:endParaRPr lang="en-US" sz="1300" dirty="0"/>
           </a:p>

--- a/docs/DBP-C1-mindline.pptx
+++ b/docs/DBP-C1-mindline.pptx
@@ -5027,7 +5027,7 @@
                 <a:ea typeface="Arial" pitchFamily="34" charset="-122"/>
                 <a:cs typeface="Arial" pitchFamily="34" charset="-120"/>
               </a:rPr>
-              <a:t>Weekday 13:00–16:00</a:t>
+              <a:t>Weekday 06:30–07:45 &amp; 13:00–15:30</a:t>
             </a:r>
             <a:endParaRPr lang="en-US" sz="1050" dirty="0"/>
           </a:p>
@@ -5066,7 +5066,7 @@
                 <a:ea typeface="Arial" pitchFamily="34" charset="-122"/>
                 <a:cs typeface="Arial" pitchFamily="34" charset="-120"/>
               </a:rPr>
-              <a:t>Primary dismissal and student-care pickup</a:t>
+              <a:t>The school run, both directions</a:t>
             </a:r>
             <a:endParaRPr lang="en-US" sz="900" dirty="0"/>
           </a:p>
@@ -5105,7 +5105,7 @@
                 <a:ea typeface="Arial" pitchFamily="34" charset="-122"/>
                 <a:cs typeface="Arial" pitchFamily="34" charset="-120"/>
               </a:rPr>
-              <a:t>Parent-facing: "Worried about your child? Talk to someone."</a:t>
+              <a:t>Child-facing: "Mind feeling under the weather?"</a:t>
             </a:r>
             <a:endParaRPr lang="en-US" sz="1100" dirty="0"/>
           </a:p>
